--- a/dist/초6/수학/연산과비례/초6_수학_연산과비례_01_분수의나눗셈1.pptx
+++ b/dist/초6/수학/연산과비례/초6_수학_연산과비례_01_분수의나눗셈1.pptx
@@ -121,13 +121,13 @@
   <p:extLst>
     <p:ext uri="{521415D9-36F7-43E2-AB2F-B90AF26B5E84}">
       <p14:sectionLst xmlns:p14="http://schemas.microsoft.com/office/powerpoint/2010/main">
-        <p14:section name="도입" id="{a2e91eb1-7452-52ac-9584-64cd1bc90d2a}">
+        <p14:section name="도입" id="{b0182ec8-e6e6-e327-5a72-87906ec8295a}">
           <p14:sldIdLst>
             <p14:sldId id="256"/>
             <p14:sldId id="257"/>
           </p14:sldIdLst>
         </p14:section>
-        <p14:section name="개념" id="{56fdd3af-4e3b-e557-93f3-c56c8dbcde95}">
+        <p14:section name="개념" id="{a76f7fc7-894a-136a-3cea-641b391e7c4e}">
           <p14:sldIdLst>
             <p14:sldId id="258"/>
             <p14:sldId id="259"/>
@@ -136,32 +136,32 @@
             <p14:sldId id="263"/>
           </p14:sldIdLst>
         </p14:section>
-        <p14:section name="연습" id="{97b125a0-4db0-5389-0ea3-5bbea6756457}">
+        <p14:section name="연습" id="{9df58071-36db-c32a-90a9-0cce1b8e0ff1}">
           <p14:sldIdLst>
             <p14:sldId id="260"/>
             <p14:sldId id="264"/>
             <p14:sldId id="265"/>
           </p14:sldIdLst>
         </p14:section>
-        <p14:section name="개념" id="{d423e90d-4ed9-c04b-44a1-0ed53bc2ae58}">
+        <p14:section name="개념" id="{6ba84ef4-38f3-a953-4d2b-b4274652b36b}">
           <p14:sldIdLst/>
         </p14:section>
-        <p14:section name="연습" id="{eca412c4-9ace-64ef-f1c2-79b6f860027d}">
+        <p14:section name="연습" id="{c579cc64-e00a-5776-1558-762c371df1b4}">
           <p14:sldIdLst/>
         </p14:section>
-        <p14:section name="확인" id="{20947c2e-7a86-3e8b-afa7-f25a67ef16c4}">
+        <p14:section name="확인" id="{9e38731b-7d4c-639f-54ee-0f533b5e14ac}">
           <p14:sldIdLst>
             <p14:sldId id="266"/>
             <p14:sldId id="267"/>
             <p14:sldId id="268"/>
           </p14:sldIdLst>
         </p14:section>
-        <p14:section name="정리" id="{2a8e1b1f-f542-9de2-ce43-31fd482f468e}">
+        <p14:section name="정리" id="{7585aa0f-3c58-c8ab-aea4-d82eb060c683}">
           <p14:sldIdLst>
             <p14:sldId id="269"/>
           </p14:sldIdLst>
         </p14:section>
-        <p14:section name="보충" id="{931cd27f-7ac5-9fdd-da62-ef97da9ce141}">
+        <p14:section name="보충" id="{21abd55a-f608-f2d9-14c9-e7f23f2616ac}">
           <p14:sldIdLst>
             <p14:sldId id="270"/>
           </p14:sldIdLst>
